--- a/data-eng/decks/w2d1s4.pptx
+++ b/data-eng/decks/w2d1s4.pptx
@@ -9654,7 +9654,7 @@
                 <a:ea typeface="Pretendard"/>
                 <a:cs typeface="Pretendard"/>
               </a:rPr>
-              <a:t>port is already</a:t>
+              <a:t>already allocated ·</a:t>
             </a:r>
           </a:p>
           <a:p>
@@ -9672,7 +9672,7 @@
                 <a:ea typeface="Pretendard"/>
                 <a:cs typeface="Pretendard"/>
               </a:rPr>
-              <a:t>allocated</a:t>
+              <a:t>밖에서만 Access denied</a:t>
             </a:r>
           </a:p>
         </p:txBody>
@@ -9840,7 +9840,7 @@
                 <a:ea typeface="Pretendard"/>
                 <a:cs typeface="Pretendard"/>
               </a:rPr>
-              <a:t>-p 3307:3306 으로 기동</a:t>
+              <a:t>설치된 MySQL 중지 또는</a:t>
             </a:r>
           </a:p>
           <a:p>
@@ -9858,7 +9858,7 @@
                 <a:ea typeface="Pretendard"/>
                 <a:cs typeface="Pretendard"/>
               </a:rPr>
-              <a:t>또는 기존 MySQL 중지</a:t>
+              <a:t>rm -f 뒤 -p 3307:3306</a:t>
             </a:r>
           </a:p>
         </p:txBody>
@@ -10119,7 +10119,7 @@
                 <a:ea typeface="Pretendard"/>
                 <a:cs typeface="Pretendard"/>
               </a:rPr>
-              <a:t>기동 명령의 비밀번호 확인</a:t>
+              <a:t>입력값 확인 — 기동 때 틀렸으면</a:t>
             </a:r>
           </a:p>
           <a:p>
@@ -10137,7 +10137,7 @@
                 <a:ea typeface="Pretendard"/>
                 <a:cs typeface="Pretendard"/>
               </a:rPr>
-              <a:t>틀렸다면 rm -f 후 재기동</a:t>
+              <a:t>rm -f + volume rm 후 재기동</a:t>
             </a:r>
           </a:p>
         </p:txBody>
@@ -10700,7 +10700,7 @@
                 <a:ea typeface="Pretendard"/>
                 <a:cs typeface="Pretendard"/>
               </a:rPr>
-              <a:t>포트를 3307 로 바꿔 띄웠다면 외부 접속도 3307 — 비밀번호가 틀렸다면 docker rm -f de-mysql 후 올바른 값으로 재기동</a:t>
+              <a:t>비밀번호는 볼륨에 남는다 — 처음 기동 때 틀렸다면 rm -f 뒤 docker volume rm de-mysql-data 까지(데이터도 지워진다)</a:t>
             </a:r>
           </a:p>
         </p:txBody>
@@ -11365,7 +11365,7 @@
                 <a:ea typeface="Pretendard"/>
                 <a:cs typeface="Pretendard"/>
               </a:rPr>
-              <a:t>COUNT(*) 로 데이터 확인</a:t>
+              <a:t>id 1~5 와 이름 확인</a:t>
             </a:r>
           </a:p>
         </p:txBody>
@@ -11406,7 +11406,7 @@
                 <a:ea typeface="Pretendard"/>
                 <a:cs typeface="Pretendard"/>
               </a:rPr>
-              <a:t>docker exec … -e "SELECT COUNT(*) FROM products;"</a:t>
+              <a:t>SELECT id, name FROM products ORDER BY id; — 2-4 가 id 2·3·4 를 쓴다</a:t>
             </a:r>
           </a:p>
         </p:txBody>
@@ -11668,7 +11668,7 @@
                 <a:ea typeface="Pretendard"/>
                 <a:cs typeface="Pretendard"/>
               </a:rPr>
-              <a:t>기대 값</a:t>
+              <a:t>어긋났다면</a:t>
             </a:r>
           </a:p>
         </p:txBody>
@@ -11709,7 +11709,7 @@
                 <a:ea typeface="Pretendard"/>
                 <a:cs typeface="Pretendard"/>
               </a:rPr>
-              <a:t>COUNT(*)</a:t>
+              <a:t>TRUNCATE 뒤</a:t>
             </a:r>
           </a:p>
           <a:p>
@@ -11727,7 +11727,7 @@
                 <a:ea typeface="Pretendard"/>
                 <a:cs typeface="Pretendard"/>
               </a:rPr>
-              <a:t>= 5</a:t>
+              <a:t>INSERT 한 번</a:t>
             </a:r>
           </a:p>
         </p:txBody>
@@ -12650,7 +12650,7 @@
                 <a:ea typeface="Pretendard"/>
                 <a:cs typeface="Pretendard"/>
               </a:rPr>
-              <a:t>키워드(SELECT 등)는 구분하지 않는다 — 테이블·컬럼 이름은 OS 에 따라 다르니 소문자로 통일</a:t>
+              <a:t>키워드는 구분하지 않는다 — 테이블 이름은 컨테이너(리눅스)라 구분한다. 소문자로 통일</a:t>
             </a:r>
           </a:p>
         </p:txBody>
@@ -13376,7 +13376,7 @@
                 <a:ea typeface="Pretendard"/>
                 <a:cs typeface="Pretendard"/>
               </a:rPr>
-              <a:t>docker rm -f de-mysql 로 지운 뒤 같은 -v 옵션으로 다시 만들어 products 데이터가 남는지 확인</a:t>
+              <a:t>docker rm -f de-mysql 로 지운 뒤 같은 -v 옵션으로 다시 만들어 products 가 남는지 확인(volume rm 은 하지 않는다)</a:t>
             </a:r>
           </a:p>
         </p:txBody>

--- a/data-eng/decks/w2d1s4.pptx
+++ b/data-eng/decks/w2d1s4.pptx
@@ -9840,7 +9840,7 @@
                 <a:ea typeface="Pretendard"/>
                 <a:cs typeface="Pretendard"/>
               </a:rPr>
-              <a:t>설치된 MySQL 중지 또는</a:t>
+              <a:t>설치된 MySQL 중지(실습점검 2단계)</a:t>
             </a:r>
           </a:p>
           <a:p>
@@ -9858,7 +9858,7 @@
                 <a:ea typeface="Pretendard"/>
                 <a:cs typeface="Pretendard"/>
               </a:rPr>
-              <a:t>rm -f 뒤 -p 3307:3306</a:t>
+              <a:t>안 되면 rm -f 뒤 -p 3307:3306</a:t>
             </a:r>
           </a:p>
         </p:txBody>
@@ -11406,7 +11406,7 @@
                 <a:ea typeface="Pretendard"/>
                 <a:cs typeface="Pretendard"/>
               </a:rPr>
-              <a:t>SELECT id, name FROM products ORDER BY id; — 2-4 가 id 2·3·4 를 쓴다</a:t>
+              <a:t>id 1~5 가 노트북 파우치 … 모니터 받침대 순 — 2-4 가 2·3·4 를 쓴다</a:t>
             </a:r>
           </a:p>
         </p:txBody>
@@ -11668,7 +11668,7 @@
                 <a:ea typeface="Pretendard"/>
                 <a:cs typeface="Pretendard"/>
               </a:rPr>
-              <a:t>어긋났다면</a:t>
+              <a:t>10행·6번부터면</a:t>
             </a:r>
           </a:p>
         </p:txBody>

--- a/data-eng/decks/w2d1s4.pptx
+++ b/data-eng/decks/w2d1s4.pptx
@@ -3099,7 +3099,7 @@
       <p:grpSpPr/>
       <p:sp>
         <p:nvSpPr>
-          <p:cNvPr id="2" name="Oval 1"/>
+          <p:cNvPr id="2" name="deckgen:decor"/>
           <p:cNvSpPr/>
           <p:nvPr/>
         </p:nvSpPr>
@@ -3129,7 +3129,7 @@
       </p:sp>
       <p:sp>
         <p:nvSpPr>
-          <p:cNvPr id="3" name="Oval 2"/>
+          <p:cNvPr id="3" name="deckgen:decor"/>
           <p:cNvSpPr/>
           <p:nvPr/>
         </p:nvSpPr>
@@ -3159,7 +3159,7 @@
       </p:sp>
       <p:sp>
         <p:nvSpPr>
-          <p:cNvPr id="4" name="Oval 3"/>
+          <p:cNvPr id="4" name="deckgen:decor"/>
           <p:cNvSpPr/>
           <p:nvPr/>
         </p:nvSpPr>
@@ -3189,7 +3189,7 @@
       </p:sp>
       <p:sp>
         <p:nvSpPr>
-          <p:cNvPr id="5" name="Rectangle 4"/>
+          <p:cNvPr id="5" name="deckgen:decor"/>
           <p:cNvSpPr/>
           <p:nvPr/>
         </p:nvSpPr>
@@ -3219,7 +3219,7 @@
       </p:sp>
       <p:sp>
         <p:nvSpPr>
-          <p:cNvPr id="6" name="Oval 5"/>
+          <p:cNvPr id="6" name="deckgen:decor"/>
           <p:cNvSpPr/>
           <p:nvPr/>
         </p:nvSpPr>
@@ -3249,7 +3249,7 @@
       </p:sp>
       <p:sp>
         <p:nvSpPr>
-          <p:cNvPr id="7" name="Oval 6"/>
+          <p:cNvPr id="7" name="deckgen:decor"/>
           <p:cNvSpPr/>
           <p:nvPr/>
         </p:nvSpPr>
@@ -3279,7 +3279,7 @@
       </p:sp>
       <p:sp>
         <p:nvSpPr>
-          <p:cNvPr id="8" name="Oval 7"/>
+          <p:cNvPr id="8" name="deckgen:decor"/>
           <p:cNvSpPr/>
           <p:nvPr/>
         </p:nvSpPr>
@@ -3309,7 +3309,7 @@
       </p:sp>
       <p:sp>
         <p:nvSpPr>
-          <p:cNvPr id="9" name="Oval 8"/>
+          <p:cNvPr id="9" name="deckgen:decor"/>
           <p:cNvSpPr/>
           <p:nvPr/>
         </p:nvSpPr>
@@ -3339,7 +3339,7 @@
       </p:sp>
       <p:sp>
         <p:nvSpPr>
-          <p:cNvPr id="10" name="Rectangle 9"/>
+          <p:cNvPr id="10" name="deckgen:decor"/>
           <p:cNvSpPr/>
           <p:nvPr/>
         </p:nvSpPr>
@@ -3433,7 +3433,7 @@
                 <a:ea typeface="Pretendard"/>
                 <a:cs typeface="Pretendard"/>
               </a:rPr>
-              <a:t>2-1 · MySQL 8.0 설치 및 기초 쿼리 · 정리·회고 0.5H</a:t>
+              <a:t>2-1 · MySQL 9.7 설치 및 기초 쿼리 · 정리·회고 0.5H</a:t>
             </a:r>
           </a:p>
         </p:txBody>
@@ -3599,7 +3599,7 @@
       <p:grpSpPr/>
       <p:sp>
         <p:nvSpPr>
-          <p:cNvPr id="2" name="Oval 1"/>
+          <p:cNvPr id="2" name="deckgen:decor"/>
           <p:cNvSpPr/>
           <p:nvPr/>
         </p:nvSpPr>
@@ -3629,7 +3629,7 @@
       </p:sp>
       <p:sp>
         <p:nvSpPr>
-          <p:cNvPr id="3" name="Oval 2"/>
+          <p:cNvPr id="3" name="deckgen:decor"/>
           <p:cNvSpPr/>
           <p:nvPr/>
         </p:nvSpPr>
@@ -4406,7 +4406,7 @@
       <p:grpSpPr/>
       <p:sp>
         <p:nvSpPr>
-          <p:cNvPr id="2" name="Oval 1"/>
+          <p:cNvPr id="2" name="deckgen:decor"/>
           <p:cNvSpPr/>
           <p:nvPr/>
         </p:nvSpPr>
@@ -4436,7 +4436,7 @@
       </p:sp>
       <p:sp>
         <p:nvSpPr>
-          <p:cNvPr id="3" name="Oval 2"/>
+          <p:cNvPr id="3" name="deckgen:decor"/>
           <p:cNvSpPr/>
           <p:nvPr/>
         </p:nvSpPr>
@@ -4466,7 +4466,7 @@
       </p:sp>
       <p:sp>
         <p:nvSpPr>
-          <p:cNvPr id="4" name="Oval 3"/>
+          <p:cNvPr id="4" name="deckgen:decor"/>
           <p:cNvSpPr/>
           <p:nvPr/>
         </p:nvSpPr>
@@ -5397,7 +5397,7 @@
       <p:grpSpPr/>
       <p:sp>
         <p:nvSpPr>
-          <p:cNvPr id="2" name="Oval 1"/>
+          <p:cNvPr id="2" name="deckgen:decor"/>
           <p:cNvSpPr/>
           <p:nvPr/>
         </p:nvSpPr>
@@ -5427,7 +5427,7 @@
       </p:sp>
       <p:sp>
         <p:nvSpPr>
-          <p:cNvPr id="3" name="Oval 2"/>
+          <p:cNvPr id="3" name="deckgen:decor"/>
           <p:cNvSpPr/>
           <p:nvPr/>
         </p:nvSpPr>
@@ -5457,7 +5457,7 @@
       </p:sp>
       <p:sp>
         <p:nvSpPr>
-          <p:cNvPr id="4" name="Oval 3"/>
+          <p:cNvPr id="4" name="deckgen:decor"/>
           <p:cNvSpPr/>
           <p:nvPr/>
         </p:nvSpPr>
@@ -7783,7 +7783,7 @@
       <p:grpSpPr/>
       <p:sp>
         <p:nvSpPr>
-          <p:cNvPr id="2" name="Oval 1"/>
+          <p:cNvPr id="2" name="deckgen:decor"/>
           <p:cNvSpPr/>
           <p:nvPr/>
         </p:nvSpPr>
@@ -7813,7 +7813,7 @@
       </p:sp>
       <p:sp>
         <p:nvSpPr>
-          <p:cNvPr id="3" name="Oval 2"/>
+          <p:cNvPr id="3" name="deckgen:decor"/>
           <p:cNvSpPr/>
           <p:nvPr/>
         </p:nvSpPr>
@@ -7843,7 +7843,7 @@
       </p:sp>
       <p:sp>
         <p:nvSpPr>
-          <p:cNvPr id="4" name="Oval 3"/>
+          <p:cNvPr id="4" name="deckgen:decor"/>
           <p:cNvSpPr/>
           <p:nvPr/>
         </p:nvSpPr>
@@ -9171,7 +9171,7 @@
       <p:grpSpPr/>
       <p:sp>
         <p:nvSpPr>
-          <p:cNvPr id="2" name="Oval 1"/>
+          <p:cNvPr id="2" name="deckgen:decor"/>
           <p:cNvSpPr/>
           <p:nvPr/>
         </p:nvSpPr>
@@ -9201,7 +9201,7 @@
       </p:sp>
       <p:sp>
         <p:nvSpPr>
-          <p:cNvPr id="3" name="Oval 2"/>
+          <p:cNvPr id="3" name="deckgen:decor"/>
           <p:cNvSpPr/>
           <p:nvPr/>
         </p:nvSpPr>
@@ -9231,7 +9231,7 @@
       </p:sp>
       <p:sp>
         <p:nvSpPr>
-          <p:cNvPr id="4" name="Oval 3"/>
+          <p:cNvPr id="4" name="deckgen:decor"/>
           <p:cNvSpPr/>
           <p:nvPr/>
         </p:nvSpPr>
@@ -10837,7 +10837,7 @@
       <p:grpSpPr/>
       <p:sp>
         <p:nvSpPr>
-          <p:cNvPr id="2" name="Oval 1"/>
+          <p:cNvPr id="2" name="deckgen:decor"/>
           <p:cNvSpPr/>
           <p:nvPr/>
         </p:nvSpPr>
@@ -10867,7 +10867,7 @@
       </p:sp>
       <p:sp>
         <p:nvSpPr>
-          <p:cNvPr id="3" name="Oval 2"/>
+          <p:cNvPr id="3" name="deckgen:decor"/>
           <p:cNvSpPr/>
           <p:nvPr/>
         </p:nvSpPr>
@@ -10897,7 +10897,7 @@
       </p:sp>
       <p:sp>
         <p:nvSpPr>
-          <p:cNvPr id="4" name="Oval 3"/>
+          <p:cNvPr id="4" name="deckgen:decor"/>
           <p:cNvSpPr/>
           <p:nvPr/>
         </p:nvSpPr>
@@ -11864,7 +11864,7 @@
       <p:grpSpPr/>
       <p:sp>
         <p:nvSpPr>
-          <p:cNvPr id="2" name="Oval 1"/>
+          <p:cNvPr id="2" name="deckgen:decor"/>
           <p:cNvSpPr/>
           <p:nvPr/>
         </p:nvSpPr>
@@ -11894,7 +11894,7 @@
       </p:sp>
       <p:sp>
         <p:nvSpPr>
-          <p:cNvPr id="3" name="Oval 2"/>
+          <p:cNvPr id="3" name="deckgen:decor"/>
           <p:cNvSpPr/>
           <p:nvPr/>
         </p:nvSpPr>
@@ -11924,7 +11924,7 @@
       </p:sp>
       <p:sp>
         <p:nvSpPr>
-          <p:cNvPr id="4" name="Oval 3"/>
+          <p:cNvPr id="4" name="deckgen:decor"/>
           <p:cNvSpPr/>
           <p:nvPr/>
         </p:nvSpPr>
@@ -12453,7 +12453,7 @@
                 <a:ea typeface="Pretendard"/>
                 <a:cs typeface="Pretendard"/>
               </a:rPr>
-              <a:t>그룹 안 여러 값 중 무엇을 보여 줄지 정할 수 없어 오류 — MySQL 8.0 은 기본으로 막는다(ONLY_FULL_GROUP_BY)</a:t>
+              <a:t>그룹 안 여러 값 중 무엇을 보여 줄지 정할 수 없어 오류 — MySQL 9.7 은 기본으로 막는다(ONLY_FULL_GROUP_BY)</a:t>
             </a:r>
           </a:p>
         </p:txBody>
@@ -12984,7 +12984,7 @@
       <p:grpSpPr/>
       <p:sp>
         <p:nvSpPr>
-          <p:cNvPr id="2" name="Oval 1"/>
+          <p:cNvPr id="2" name="deckgen:decor"/>
           <p:cNvSpPr/>
           <p:nvPr/>
         </p:nvSpPr>
@@ -13014,7 +13014,7 @@
       </p:sp>
       <p:sp>
         <p:nvSpPr>
-          <p:cNvPr id="3" name="Oval 2"/>
+          <p:cNvPr id="3" name="deckgen:decor"/>
           <p:cNvSpPr/>
           <p:nvPr/>
         </p:nvSpPr>
@@ -13044,7 +13044,7 @@
       </p:sp>
       <p:sp>
         <p:nvSpPr>
-          <p:cNvPr id="4" name="Oval 3"/>
+          <p:cNvPr id="4" name="deckgen:decor"/>
           <p:cNvSpPr/>
           <p:nvPr/>
         </p:nvSpPr>
@@ -14104,7 +14104,7 @@
       <p:grpSpPr/>
       <p:sp>
         <p:nvSpPr>
-          <p:cNvPr id="2" name="Oval 1"/>
+          <p:cNvPr id="2" name="deckgen:decor"/>
           <p:cNvSpPr/>
           <p:nvPr/>
         </p:nvSpPr>
@@ -14134,7 +14134,7 @@
       </p:sp>
       <p:sp>
         <p:nvSpPr>
-          <p:cNvPr id="3" name="Oval 2"/>
+          <p:cNvPr id="3" name="deckgen:decor"/>
           <p:cNvSpPr/>
           <p:nvPr/>
         </p:nvSpPr>
@@ -14164,7 +14164,7 @@
       </p:sp>
       <p:sp>
         <p:nvSpPr>
-          <p:cNvPr id="4" name="Oval 3"/>
+          <p:cNvPr id="4" name="deckgen:decor"/>
           <p:cNvSpPr/>
           <p:nvPr/>
         </p:nvSpPr>
@@ -14370,7 +14370,7 @@
       </p:sp>
       <p:sp>
         <p:nvSpPr>
-          <p:cNvPr id="10" name="TextBox 9"/>
+          <p:cNvPr id="10" name="deckgen:ornament"/>
           <p:cNvSpPr txBox="1"/>
           <p:nvPr/>
         </p:nvSpPr>
@@ -14555,7 +14555,7 @@
       </p:sp>
       <p:sp>
         <p:nvSpPr>
-          <p:cNvPr id="14" name="TextBox 13"/>
+          <p:cNvPr id="14" name="deckgen:ornament"/>
           <p:cNvSpPr txBox="1"/>
           <p:nvPr/>
         </p:nvSpPr>
@@ -14740,7 +14740,7 @@
       </p:sp>
       <p:sp>
         <p:nvSpPr>
-          <p:cNvPr id="18" name="TextBox 17"/>
+          <p:cNvPr id="18" name="deckgen:ornament"/>
           <p:cNvSpPr txBox="1"/>
           <p:nvPr/>
         </p:nvSpPr>
